--- a/profile/images/buttons.pptx
+++ b/profile/images/buttons.pptx
@@ -125,12 +125,12 @@
   <pc:docChgLst>
     <pc:chgData name="Kristoffer Gulmark Poulsen" userId="ad511437-3b62-45cf-8f4e-1fb459602f33" providerId="ADAL" clId="{1F7BF2AE-28F5-48AC-A1F8-94893075803A}"/>
     <pc:docChg chg="undo custSel addSld modSld">
-      <pc:chgData name="Kristoffer Gulmark Poulsen" userId="ad511437-3b62-45cf-8f4e-1fb459602f33" providerId="ADAL" clId="{1F7BF2AE-28F5-48AC-A1F8-94893075803A}" dt="2023-04-27T13:36:54.826" v="689"/>
+      <pc:chgData name="Kristoffer Gulmark Poulsen" userId="ad511437-3b62-45cf-8f4e-1fb459602f33" providerId="ADAL" clId="{1F7BF2AE-28F5-48AC-A1F8-94893075803A}" dt="2023-05-01T08:08:52.188" v="760" actId="404"/>
       <pc:docMkLst>
         <pc:docMk/>
       </pc:docMkLst>
       <pc:sldChg chg="addSp delSp modSp new mod modClrScheme chgLayout">
-        <pc:chgData name="Kristoffer Gulmark Poulsen" userId="ad511437-3b62-45cf-8f4e-1fb459602f33" providerId="ADAL" clId="{1F7BF2AE-28F5-48AC-A1F8-94893075803A}" dt="2023-04-27T13:36:54.826" v="689"/>
+        <pc:chgData name="Kristoffer Gulmark Poulsen" userId="ad511437-3b62-45cf-8f4e-1fb459602f33" providerId="ADAL" clId="{1F7BF2AE-28F5-48AC-A1F8-94893075803A}" dt="2023-05-01T08:08:52.188" v="760" actId="404"/>
         <pc:sldMkLst>
           <pc:docMk/>
           <pc:sldMk cId="1355665285" sldId="256"/>
@@ -144,7 +144,7 @@
           </ac:spMkLst>
         </pc:spChg>
         <pc:spChg chg="add mod">
-          <ac:chgData name="Kristoffer Gulmark Poulsen" userId="ad511437-3b62-45cf-8f4e-1fb459602f33" providerId="ADAL" clId="{1F7BF2AE-28F5-48AC-A1F8-94893075803A}" dt="2023-04-27T13:35:42.200" v="671" actId="14100"/>
+          <ac:chgData name="Kristoffer Gulmark Poulsen" userId="ad511437-3b62-45cf-8f4e-1fb459602f33" providerId="ADAL" clId="{1F7BF2AE-28F5-48AC-A1F8-94893075803A}" dt="2023-05-01T08:08:52.188" v="760" actId="404"/>
           <ac:spMkLst>
             <pc:docMk/>
             <pc:sldMk cId="1355665285" sldId="256"/>
@@ -160,7 +160,7 @@
           </ac:spMkLst>
         </pc:spChg>
         <pc:spChg chg="add mod">
-          <ac:chgData name="Kristoffer Gulmark Poulsen" userId="ad511437-3b62-45cf-8f4e-1fb459602f33" providerId="ADAL" clId="{1F7BF2AE-28F5-48AC-A1F8-94893075803A}" dt="2023-04-27T13:36:09.553" v="679" actId="1076"/>
+          <ac:chgData name="Kristoffer Gulmark Poulsen" userId="ad511437-3b62-45cf-8f4e-1fb459602f33" providerId="ADAL" clId="{1F7BF2AE-28F5-48AC-A1F8-94893075803A}" dt="2023-05-01T08:08:41.789" v="756" actId="403"/>
           <ac:spMkLst>
             <pc:docMk/>
             <pc:sldMk cId="1355665285" sldId="256"/>
@@ -184,7 +184,7 @@
           </ac:spMkLst>
         </pc:spChg>
         <pc:spChg chg="add mod">
-          <ac:chgData name="Kristoffer Gulmark Poulsen" userId="ad511437-3b62-45cf-8f4e-1fb459602f33" providerId="ADAL" clId="{1F7BF2AE-28F5-48AC-A1F8-94893075803A}" dt="2023-04-27T13:36:01.008" v="676" actId="1076"/>
+          <ac:chgData name="Kristoffer Gulmark Poulsen" userId="ad511437-3b62-45cf-8f4e-1fb459602f33" providerId="ADAL" clId="{1F7BF2AE-28F5-48AC-A1F8-94893075803A}" dt="2023-05-01T08:08:36.652" v="754" actId="403"/>
           <ac:spMkLst>
             <pc:docMk/>
             <pc:sldMk cId="1355665285" sldId="256"/>
@@ -208,7 +208,7 @@
           </ac:spMkLst>
         </pc:spChg>
         <pc:spChg chg="add mod">
-          <ac:chgData name="Kristoffer Gulmark Poulsen" userId="ad511437-3b62-45cf-8f4e-1fb459602f33" providerId="ADAL" clId="{1F7BF2AE-28F5-48AC-A1F8-94893075803A}" dt="2023-04-27T13:35:48.504" v="673" actId="1076"/>
+          <ac:chgData name="Kristoffer Gulmark Poulsen" userId="ad511437-3b62-45cf-8f4e-1fb459602f33" providerId="ADAL" clId="{1F7BF2AE-28F5-48AC-A1F8-94893075803A}" dt="2023-05-01T08:08:44.224" v="757" actId="403"/>
           <ac:spMkLst>
             <pc:docMk/>
             <pc:sldMk cId="1355665285" sldId="256"/>
@@ -216,15 +216,15 @@
           </ac:spMkLst>
         </pc:spChg>
         <pc:spChg chg="add mod">
-          <ac:chgData name="Kristoffer Gulmark Poulsen" userId="ad511437-3b62-45cf-8f4e-1fb459602f33" providerId="ADAL" clId="{1F7BF2AE-28F5-48AC-A1F8-94893075803A}" dt="2023-04-27T13:36:27.977" v="684" actId="14100"/>
+          <ac:chgData name="Kristoffer Gulmark Poulsen" userId="ad511437-3b62-45cf-8f4e-1fb459602f33" providerId="ADAL" clId="{1F7BF2AE-28F5-48AC-A1F8-94893075803A}" dt="2023-05-01T08:08:39.184" v="755" actId="403"/>
           <ac:spMkLst>
             <pc:docMk/>
             <pc:sldMk cId="1355665285" sldId="256"/>
             <ac:spMk id="8" creationId="{E537B157-0100-9998-07F4-2CE341972B7C}"/>
           </ac:spMkLst>
         </pc:spChg>
-        <pc:spChg chg="add mod">
-          <ac:chgData name="Kristoffer Gulmark Poulsen" userId="ad511437-3b62-45cf-8f4e-1fb459602f33" providerId="ADAL" clId="{1F7BF2AE-28F5-48AC-A1F8-94893075803A}" dt="2023-04-27T13:36:54.826" v="689"/>
+        <pc:spChg chg="add del mod">
+          <ac:chgData name="Kristoffer Gulmark Poulsen" userId="ad511437-3b62-45cf-8f4e-1fb459602f33" providerId="ADAL" clId="{1F7BF2AE-28F5-48AC-A1F8-94893075803A}" dt="2023-05-01T08:08:30.268" v="753" actId="478"/>
           <ac:spMkLst>
             <pc:docMk/>
             <pc:sldMk cId="1355665285" sldId="256"/>
@@ -488,7 +488,7 @@
           <a:p>
             <a:fld id="{4C70CE9B-E119-4453-AD23-71B3C4786D64}" type="datetimeFigureOut">
               <a:rPr lang="da-DK" smtClean="0"/>
-              <a:t>27-04-2023</a:t>
+              <a:t>01-05-2023</a:t>
             </a:fld>
             <a:endParaRPr lang="da-DK"/>
           </a:p>
@@ -686,7 +686,7 @@
           <a:p>
             <a:fld id="{4C70CE9B-E119-4453-AD23-71B3C4786D64}" type="datetimeFigureOut">
               <a:rPr lang="da-DK" smtClean="0"/>
-              <a:t>27-04-2023</a:t>
+              <a:t>01-05-2023</a:t>
             </a:fld>
             <a:endParaRPr lang="da-DK"/>
           </a:p>
@@ -894,7 +894,7 @@
           <a:p>
             <a:fld id="{4C70CE9B-E119-4453-AD23-71B3C4786D64}" type="datetimeFigureOut">
               <a:rPr lang="da-DK" smtClean="0"/>
-              <a:t>27-04-2023</a:t>
+              <a:t>01-05-2023</a:t>
             </a:fld>
             <a:endParaRPr lang="da-DK"/>
           </a:p>
@@ -1092,7 +1092,7 @@
           <a:p>
             <a:fld id="{4C70CE9B-E119-4453-AD23-71B3C4786D64}" type="datetimeFigureOut">
               <a:rPr lang="da-DK" smtClean="0"/>
-              <a:t>27-04-2023</a:t>
+              <a:t>01-05-2023</a:t>
             </a:fld>
             <a:endParaRPr lang="da-DK"/>
           </a:p>
@@ -1367,7 +1367,7 @@
           <a:p>
             <a:fld id="{4C70CE9B-E119-4453-AD23-71B3C4786D64}" type="datetimeFigureOut">
               <a:rPr lang="da-DK" smtClean="0"/>
-              <a:t>27-04-2023</a:t>
+              <a:t>01-05-2023</a:t>
             </a:fld>
             <a:endParaRPr lang="da-DK"/>
           </a:p>
@@ -1632,7 +1632,7 @@
           <a:p>
             <a:fld id="{4C70CE9B-E119-4453-AD23-71B3C4786D64}" type="datetimeFigureOut">
               <a:rPr lang="da-DK" smtClean="0"/>
-              <a:t>27-04-2023</a:t>
+              <a:t>01-05-2023</a:t>
             </a:fld>
             <a:endParaRPr lang="da-DK"/>
           </a:p>
@@ -2044,7 +2044,7 @@
           <a:p>
             <a:fld id="{4C70CE9B-E119-4453-AD23-71B3C4786D64}" type="datetimeFigureOut">
               <a:rPr lang="da-DK" smtClean="0"/>
-              <a:t>27-04-2023</a:t>
+              <a:t>01-05-2023</a:t>
             </a:fld>
             <a:endParaRPr lang="da-DK"/>
           </a:p>
@@ -2185,7 +2185,7 @@
           <a:p>
             <a:fld id="{4C70CE9B-E119-4453-AD23-71B3C4786D64}" type="datetimeFigureOut">
               <a:rPr lang="da-DK" smtClean="0"/>
-              <a:t>27-04-2023</a:t>
+              <a:t>01-05-2023</a:t>
             </a:fld>
             <a:endParaRPr lang="da-DK"/>
           </a:p>
@@ -2298,7 +2298,7 @@
           <a:p>
             <a:fld id="{4C70CE9B-E119-4453-AD23-71B3C4786D64}" type="datetimeFigureOut">
               <a:rPr lang="da-DK" smtClean="0"/>
-              <a:t>27-04-2023</a:t>
+              <a:t>01-05-2023</a:t>
             </a:fld>
             <a:endParaRPr lang="da-DK"/>
           </a:p>
@@ -2609,7 +2609,7 @@
           <a:p>
             <a:fld id="{4C70CE9B-E119-4453-AD23-71B3C4786D64}" type="datetimeFigureOut">
               <a:rPr lang="da-DK" smtClean="0"/>
-              <a:t>27-04-2023</a:t>
+              <a:t>01-05-2023</a:t>
             </a:fld>
             <a:endParaRPr lang="da-DK"/>
           </a:p>
@@ -2897,7 +2897,7 @@
           <a:p>
             <a:fld id="{4C70CE9B-E119-4453-AD23-71B3C4786D64}" type="datetimeFigureOut">
               <a:rPr lang="da-DK" smtClean="0"/>
-              <a:t>27-04-2023</a:t>
+              <a:t>01-05-2023</a:t>
             </a:fld>
             <a:endParaRPr lang="da-DK"/>
           </a:p>
@@ -3138,7 +3138,7 @@
           <a:p>
             <a:fld id="{4C70CE9B-E119-4453-AD23-71B3C4786D64}" type="datetimeFigureOut">
               <a:rPr lang="da-DK" smtClean="0"/>
-              <a:t>27-04-2023</a:t>
+              <a:t>01-05-2023</a:t>
             </a:fld>
             <a:endParaRPr lang="da-DK"/>
           </a:p>
@@ -3900,8 +3900,8 @@
         </p:nvSpPr>
         <p:spPr>
           <a:xfrm>
-            <a:off x="6391012" y="3900348"/>
-            <a:ext cx="973950" cy="485040"/>
+            <a:off x="9396878" y="2663057"/>
+            <a:ext cx="1148322" cy="619714"/>
           </a:xfrm>
           <a:prstGeom prst="roundRect">
             <a:avLst/>
@@ -3940,12 +3940,12 @@
           <a:p>
             <a:pPr algn="ctr"/>
             <a:r>
-              <a:rPr lang="en-US" sz="1050" b="1" dirty="0">
+              <a:rPr lang="en-US" sz="1100" b="1" dirty="0">
                 <a:solidFill>
                   <a:schemeClr val="accent1"/>
                 </a:solidFill>
               </a:rPr>
-              <a:t>Tutorials</a:t>
+              <a:t>Tutorials &amp; Documentation</a:t>
             </a:r>
           </a:p>
         </p:txBody>
@@ -3964,8 +3964,8 @@
         </p:nvSpPr>
         <p:spPr>
           <a:xfrm>
-            <a:off x="4183871" y="3900345"/>
-            <a:ext cx="973950" cy="485041"/>
+            <a:off x="6456328" y="2663058"/>
+            <a:ext cx="1148322" cy="620654"/>
           </a:xfrm>
           <a:prstGeom prst="roundRect">
             <a:avLst/>
@@ -4004,7 +4004,7 @@
           <a:p>
             <a:pPr algn="ctr"/>
             <a:r>
-              <a:rPr lang="en-US" sz="1100" b="1" dirty="0">
+              <a:rPr lang="en-US" sz="1200" b="1" dirty="0">
                 <a:solidFill>
                   <a:schemeClr val="accent1"/>
                 </a:solidFill>
@@ -4028,8 +4028,8 @@
         </p:nvSpPr>
         <p:spPr>
           <a:xfrm>
-            <a:off x="5254315" y="3900348"/>
-            <a:ext cx="973950" cy="485040"/>
+            <a:off x="3035547" y="2663058"/>
+            <a:ext cx="1148324" cy="620654"/>
           </a:xfrm>
           <a:prstGeom prst="roundRect">
             <a:avLst/>
@@ -4068,12 +4068,12 @@
           <a:p>
             <a:pPr algn="ctr"/>
             <a:r>
-              <a:rPr lang="en-US" sz="1100" b="1" dirty="0">
+              <a:rPr lang="en-US" sz="1200" b="1" dirty="0">
                 <a:solidFill>
                   <a:schemeClr val="accent1"/>
                 </a:solidFill>
               </a:rPr>
-              <a:t>Available Facilities</a:t>
+              <a:t>HPC Facilities</a:t>
             </a:r>
           </a:p>
         </p:txBody>
@@ -4092,8 +4092,8 @@
         </p:nvSpPr>
         <p:spPr>
           <a:xfrm>
-            <a:off x="7604650" y="3900348"/>
-            <a:ext cx="973951" cy="485040"/>
+            <a:off x="7811480" y="2663057"/>
+            <a:ext cx="1148322" cy="619715"/>
           </a:xfrm>
           <a:prstGeom prst="roundRect">
             <a:avLst/>
@@ -4132,7 +4132,7 @@
           <a:p>
             <a:pPr algn="ctr"/>
             <a:r>
-              <a:rPr lang="da-DK" sz="1100" b="1" dirty="0">
+              <a:rPr lang="da-DK" sz="1200" b="1" dirty="0">
                 <a:solidFill>
                   <a:schemeClr val="accent1"/>
                 </a:solidFill>
@@ -4156,8 +4156,8 @@
         </p:nvSpPr>
         <p:spPr>
           <a:xfrm>
-            <a:off x="4183870" y="4458311"/>
-            <a:ext cx="973949" cy="485042"/>
+            <a:off x="4664635" y="2663058"/>
+            <a:ext cx="1148322" cy="620654"/>
           </a:xfrm>
           <a:prstGeom prst="roundRect">
             <a:avLst/>
@@ -4196,76 +4196,12 @@
           <a:p>
             <a:pPr algn="ctr"/>
             <a:r>
-              <a:rPr lang="en-US" sz="1100" b="1" dirty="0">
+              <a:rPr lang="en-US" sz="1200" b="1" dirty="0">
                 <a:solidFill>
                   <a:schemeClr val="accent1"/>
                 </a:solidFill>
               </a:rPr>
               <a:t>News</a:t>
-            </a:r>
-          </a:p>
-        </p:txBody>
-      </p:sp>
-      <p:sp>
-        <p:nvSpPr>
-          <p:cNvPr id="9" name="Rektangel: afrundede hjørner 8">
-            <a:extLst>
-              <a:ext uri="{FF2B5EF4-FFF2-40B4-BE49-F238E27FC236}">
-                <a16:creationId xmlns:a16="http://schemas.microsoft.com/office/drawing/2014/main" id="{CC59CBB2-2840-C397-265C-DB74D58447FB}"/>
-              </a:ext>
-            </a:extLst>
-          </p:cNvPr>
-          <p:cNvSpPr/>
-          <p:nvPr/>
-        </p:nvSpPr>
-        <p:spPr>
-          <a:xfrm>
-            <a:off x="6456326" y="4544160"/>
-            <a:ext cx="973950" cy="485040"/>
-          </a:xfrm>
-          <a:prstGeom prst="roundRect">
-            <a:avLst/>
-          </a:prstGeom>
-          <a:solidFill>
-            <a:schemeClr val="accent1">
-              <a:lumMod val="20000"/>
-              <a:lumOff val="80000"/>
-            </a:schemeClr>
-          </a:solidFill>
-          <a:ln w="28575">
-            <a:solidFill>
-              <a:schemeClr val="accent1"/>
-            </a:solidFill>
-          </a:ln>
-        </p:spPr>
-        <p:style>
-          <a:lnRef idx="2">
-            <a:schemeClr val="accent1">
-              <a:shade val="50000"/>
-            </a:schemeClr>
-          </a:lnRef>
-          <a:fillRef idx="1">
-            <a:schemeClr val="accent1"/>
-          </a:fillRef>
-          <a:effectRef idx="0">
-            <a:schemeClr val="accent1"/>
-          </a:effectRef>
-          <a:fontRef idx="minor">
-            <a:schemeClr val="lt1"/>
-          </a:fontRef>
-        </p:style>
-        <p:txBody>
-          <a:bodyPr rtlCol="0" anchor="ctr"/>
-          <a:lstStyle/>
-          <a:p>
-            <a:pPr algn="ctr"/>
-            <a:r>
-              <a:rPr lang="en-US" sz="1050" b="1" dirty="0">
-                <a:solidFill>
-                  <a:schemeClr val="accent1"/>
-                </a:solidFill>
-              </a:rPr>
-              <a:t>External Links</a:t>
             </a:r>
           </a:p>
         </p:txBody>

--- a/profile/images/buttons.pptx
+++ b/profile/images/buttons.pptx
@@ -125,12 +125,12 @@
   <pc:docChgLst>
     <pc:chgData name="Kristoffer Gulmark Poulsen" userId="ad511437-3b62-45cf-8f4e-1fb459602f33" providerId="ADAL" clId="{1F7BF2AE-28F5-48AC-A1F8-94893075803A}"/>
     <pc:docChg chg="undo custSel addSld modSld">
-      <pc:chgData name="Kristoffer Gulmark Poulsen" userId="ad511437-3b62-45cf-8f4e-1fb459602f33" providerId="ADAL" clId="{1F7BF2AE-28F5-48AC-A1F8-94893075803A}" dt="2023-05-01T08:08:52.188" v="760" actId="404"/>
+      <pc:chgData name="Kristoffer Gulmark Poulsen" userId="ad511437-3b62-45cf-8f4e-1fb459602f33" providerId="ADAL" clId="{1F7BF2AE-28F5-48AC-A1F8-94893075803A}" dt="2023-05-01T08:21:38.328" v="772" actId="1076"/>
       <pc:docMkLst>
         <pc:docMk/>
       </pc:docMkLst>
       <pc:sldChg chg="addSp delSp modSp new mod modClrScheme chgLayout">
-        <pc:chgData name="Kristoffer Gulmark Poulsen" userId="ad511437-3b62-45cf-8f4e-1fb459602f33" providerId="ADAL" clId="{1F7BF2AE-28F5-48AC-A1F8-94893075803A}" dt="2023-05-01T08:08:52.188" v="760" actId="404"/>
+        <pc:chgData name="Kristoffer Gulmark Poulsen" userId="ad511437-3b62-45cf-8f4e-1fb459602f33" providerId="ADAL" clId="{1F7BF2AE-28F5-48AC-A1F8-94893075803A}" dt="2023-05-01T08:21:38.328" v="772" actId="1076"/>
         <pc:sldMkLst>
           <pc:docMk/>
           <pc:sldMk cId="1355665285" sldId="256"/>
@@ -144,7 +144,7 @@
           </ac:spMkLst>
         </pc:spChg>
         <pc:spChg chg="add mod">
-          <ac:chgData name="Kristoffer Gulmark Poulsen" userId="ad511437-3b62-45cf-8f4e-1fb459602f33" providerId="ADAL" clId="{1F7BF2AE-28F5-48AC-A1F8-94893075803A}" dt="2023-05-01T08:08:52.188" v="760" actId="404"/>
+          <ac:chgData name="Kristoffer Gulmark Poulsen" userId="ad511437-3b62-45cf-8f4e-1fb459602f33" providerId="ADAL" clId="{1F7BF2AE-28F5-48AC-A1F8-94893075803A}" dt="2023-05-01T08:21:28.342" v="769" actId="1076"/>
           <ac:spMkLst>
             <pc:docMk/>
             <pc:sldMk cId="1355665285" sldId="256"/>
@@ -160,7 +160,7 @@
           </ac:spMkLst>
         </pc:spChg>
         <pc:spChg chg="add mod">
-          <ac:chgData name="Kristoffer Gulmark Poulsen" userId="ad511437-3b62-45cf-8f4e-1fb459602f33" providerId="ADAL" clId="{1F7BF2AE-28F5-48AC-A1F8-94893075803A}" dt="2023-05-01T08:08:41.789" v="756" actId="403"/>
+          <ac:chgData name="Kristoffer Gulmark Poulsen" userId="ad511437-3b62-45cf-8f4e-1fb459602f33" providerId="ADAL" clId="{1F7BF2AE-28F5-48AC-A1F8-94893075803A}" dt="2023-05-01T08:21:21.967" v="766" actId="1076"/>
           <ac:spMkLst>
             <pc:docMk/>
             <pc:sldMk cId="1355665285" sldId="256"/>
@@ -168,7 +168,7 @@
           </ac:spMkLst>
         </pc:spChg>
         <pc:spChg chg="add mod topLvl">
-          <ac:chgData name="Kristoffer Gulmark Poulsen" userId="ad511437-3b62-45cf-8f4e-1fb459602f33" providerId="ADAL" clId="{1F7BF2AE-28F5-48AC-A1F8-94893075803A}" dt="2023-04-27T12:58:20.938" v="585" actId="14100"/>
+          <ac:chgData name="Kristoffer Gulmark Poulsen" userId="ad511437-3b62-45cf-8f4e-1fb459602f33" providerId="ADAL" clId="{1F7BF2AE-28F5-48AC-A1F8-94893075803A}" dt="2023-05-01T08:21:31.087" v="770" actId="1076"/>
           <ac:spMkLst>
             <pc:docMk/>
             <pc:sldMk cId="1355665285" sldId="256"/>
@@ -184,7 +184,7 @@
           </ac:spMkLst>
         </pc:spChg>
         <pc:spChg chg="add mod">
-          <ac:chgData name="Kristoffer Gulmark Poulsen" userId="ad511437-3b62-45cf-8f4e-1fb459602f33" providerId="ADAL" clId="{1F7BF2AE-28F5-48AC-A1F8-94893075803A}" dt="2023-05-01T08:08:36.652" v="754" actId="403"/>
+          <ac:chgData name="Kristoffer Gulmark Poulsen" userId="ad511437-3b62-45cf-8f4e-1fb459602f33" providerId="ADAL" clId="{1F7BF2AE-28F5-48AC-A1F8-94893075803A}" dt="2023-05-01T08:21:38.328" v="772" actId="1076"/>
           <ac:spMkLst>
             <pc:docMk/>
             <pc:sldMk cId="1355665285" sldId="256"/>
@@ -208,7 +208,7 @@
           </ac:spMkLst>
         </pc:spChg>
         <pc:spChg chg="add mod">
-          <ac:chgData name="Kristoffer Gulmark Poulsen" userId="ad511437-3b62-45cf-8f4e-1fb459602f33" providerId="ADAL" clId="{1F7BF2AE-28F5-48AC-A1F8-94893075803A}" dt="2023-05-01T08:08:44.224" v="757" actId="403"/>
+          <ac:chgData name="Kristoffer Gulmark Poulsen" userId="ad511437-3b62-45cf-8f4e-1fb459602f33" providerId="ADAL" clId="{1F7BF2AE-28F5-48AC-A1F8-94893075803A}" dt="2023-05-01T08:21:23.782" v="767" actId="1076"/>
           <ac:spMkLst>
             <pc:docMk/>
             <pc:sldMk cId="1355665285" sldId="256"/>
@@ -232,7 +232,7 @@
           </ac:spMkLst>
         </pc:spChg>
         <pc:spChg chg="add mod topLvl">
-          <ac:chgData name="Kristoffer Gulmark Poulsen" userId="ad511437-3b62-45cf-8f4e-1fb459602f33" providerId="ADAL" clId="{1F7BF2AE-28F5-48AC-A1F8-94893075803A}" dt="2023-04-27T12:58:17.860" v="584" actId="14100"/>
+          <ac:chgData name="Kristoffer Gulmark Poulsen" userId="ad511437-3b62-45cf-8f4e-1fb459602f33" providerId="ADAL" clId="{1F7BF2AE-28F5-48AC-A1F8-94893075803A}" dt="2023-05-01T08:21:26.092" v="768" actId="1076"/>
           <ac:spMkLst>
             <pc:docMk/>
             <pc:sldMk cId="1355665285" sldId="256"/>
@@ -256,7 +256,7 @@
           </ac:spMkLst>
         </pc:spChg>
         <pc:spChg chg="add mod topLvl">
-          <ac:chgData name="Kristoffer Gulmark Poulsen" userId="ad511437-3b62-45cf-8f4e-1fb459602f33" providerId="ADAL" clId="{1F7BF2AE-28F5-48AC-A1F8-94893075803A}" dt="2023-04-27T12:58:13.984" v="583" actId="14100"/>
+          <ac:chgData name="Kristoffer Gulmark Poulsen" userId="ad511437-3b62-45cf-8f4e-1fb459602f33" providerId="ADAL" clId="{1F7BF2AE-28F5-48AC-A1F8-94893075803A}" dt="2023-05-01T08:21:19.367" v="765" actId="1076"/>
           <ac:spMkLst>
             <pc:docMk/>
             <pc:sldMk cId="1355665285" sldId="256"/>
@@ -264,7 +264,7 @@
           </ac:spMkLst>
         </pc:spChg>
         <pc:spChg chg="add mod topLvl">
-          <ac:chgData name="Kristoffer Gulmark Poulsen" userId="ad511437-3b62-45cf-8f4e-1fb459602f33" providerId="ADAL" clId="{1F7BF2AE-28F5-48AC-A1F8-94893075803A}" dt="2023-04-27T12:57:52.188" v="575" actId="14100"/>
+          <ac:chgData name="Kristoffer Gulmark Poulsen" userId="ad511437-3b62-45cf-8f4e-1fb459602f33" providerId="ADAL" clId="{1F7BF2AE-28F5-48AC-A1F8-94893075803A}" dt="2023-05-01T08:21:34.486" v="771" actId="1076"/>
           <ac:spMkLst>
             <pc:docMk/>
             <pc:sldMk cId="1355665285" sldId="256"/>
@@ -3569,7 +3569,7 @@
         </p:nvSpPr>
         <p:spPr>
           <a:xfrm>
-            <a:off x="9396878" y="1754378"/>
+            <a:off x="8875121" y="1754155"/>
             <a:ext cx="1148322" cy="619715"/>
           </a:xfrm>
           <a:prstGeom prst="roundRect">
@@ -3697,7 +3697,7 @@
         </p:nvSpPr>
         <p:spPr>
           <a:xfrm>
-            <a:off x="7811480" y="1755094"/>
+            <a:off x="7471627" y="1755094"/>
             <a:ext cx="1148322" cy="619715"/>
           </a:xfrm>
           <a:prstGeom prst="roundRect">
@@ -3761,7 +3761,7 @@
         </p:nvSpPr>
         <p:spPr>
           <a:xfrm>
-            <a:off x="6456326" y="1754155"/>
+            <a:off x="6068131" y="1754155"/>
             <a:ext cx="1148324" cy="620654"/>
           </a:xfrm>
           <a:prstGeom prst="roundRect">
@@ -3825,8 +3825,8 @@
         </p:nvSpPr>
         <p:spPr>
           <a:xfrm>
-            <a:off x="3035548" y="1754155"/>
-            <a:ext cx="1148323" cy="620654"/>
+            <a:off x="3261141" y="1753216"/>
+            <a:ext cx="1148324" cy="620654"/>
           </a:xfrm>
           <a:prstGeom prst="roundRect">
             <a:avLst/>
@@ -3900,7 +3900,7 @@
         </p:nvSpPr>
         <p:spPr>
           <a:xfrm>
-            <a:off x="9396878" y="2663057"/>
+            <a:off x="8875123" y="2663057"/>
             <a:ext cx="1148322" cy="619714"/>
           </a:xfrm>
           <a:prstGeom prst="roundRect">
@@ -3964,7 +3964,7 @@
         </p:nvSpPr>
         <p:spPr>
           <a:xfrm>
-            <a:off x="6456328" y="2663058"/>
+            <a:off x="6068131" y="2662117"/>
             <a:ext cx="1148322" cy="620654"/>
           </a:xfrm>
           <a:prstGeom prst="roundRect">
@@ -4028,7 +4028,7 @@
         </p:nvSpPr>
         <p:spPr>
           <a:xfrm>
-            <a:off x="3035547" y="2663058"/>
+            <a:off x="3261137" y="2662117"/>
             <a:ext cx="1148324" cy="620654"/>
           </a:xfrm>
           <a:prstGeom prst="roundRect">
@@ -4092,7 +4092,7 @@
         </p:nvSpPr>
         <p:spPr>
           <a:xfrm>
-            <a:off x="7811480" y="2663057"/>
+            <a:off x="7471627" y="2663056"/>
             <a:ext cx="1148322" cy="619715"/>
           </a:xfrm>
           <a:prstGeom prst="roundRect">
